--- a/docs/lectures/ESQC Math 2026 Lecture 2.pptx
+++ b/docs/lectures/ESQC Math 2026 Lecture 2.pptx
@@ -12783,7 +12783,7 @@
           <a:p>
             <a:r>
               <a:rPr lang="nb-NO"/>
-              <a:t>More on matrices</a:t>
+              <a:t>More on matrices and linear transformations</a:t>
             </a:r>
           </a:p>
           <a:p>
@@ -19148,7 +19148,10 @@
           <a:bodyPr/>
           <a:lstStyle/>
           <a:p>
-            <a:endParaRPr lang="nb-NO"/>
+            <a:r>
+              <a:rPr lang="nb-NO"/>
+              <a:t>From yesterday</a:t>
+            </a:r>
           </a:p>
         </p:txBody>
       </p:sp>
